--- a/downloads/sgl-intro.pptx
+++ b/downloads/sgl-intro.pptx
@@ -7414,7 +7414,7 @@
                 <a:ea typeface="Pretendard" pitchFamily="34" charset="-122"/>
                 <a:cs typeface="Pretendard" pitchFamily="34" charset="-120"/>
               </a:rPr>
-              <a:t>웹</a:t>
+              <a:t>전화</a:t>
             </a:r>
             <a:endParaRPr lang="ko-KR" sz="1300" dirty="0"/>
           </a:p>
@@ -7473,7 +7473,7 @@
                 <a:ea typeface="Pretendard" pitchFamily="34" charset="-122"/>
                 <a:cs typeface="Pretendard" pitchFamily="34" charset="-120"/>
               </a:rPr>
-              <a:t>홈페이지 주소 자리</a:t>
+              <a:t>전화번호 자리</a:t>
             </a:r>
             <a:endParaRPr lang="ko-KR" sz="1300" dirty="0"/>
           </a:p>
@@ -7515,7 +7515,7 @@
                 <a:ea typeface="Pretendard" pitchFamily="34" charset="-122"/>
                 <a:cs typeface="Pretendard" pitchFamily="34" charset="-120"/>
               </a:rPr>
-              <a:t>연구실</a:t>
+              <a:t>웹</a:t>
             </a:r>
             <a:endParaRPr lang="ko-KR" sz="1300" dirty="0"/>
           </a:p>
@@ -7574,7 +7574,7 @@
                 <a:ea typeface="Pretendard" pitchFamily="34" charset="-122"/>
                 <a:cs typeface="Pretendard" pitchFamily="34" charset="-120"/>
               </a:rPr>
-              <a:t>동서대학교 · 건물·호수 자리</a:t>
+              <a:t>홈페이지 주소 자리</a:t>
             </a:r>
             <a:endParaRPr lang="ko-KR" sz="1300" dirty="0"/>
           </a:p>
@@ -10815,7 +10815,7 @@
                 <a:ea typeface="Pretendard" pitchFamily="34" charset="-122"/>
                 <a:cs typeface="Pretendard" pitchFamily="34" charset="-120"/>
               </a:rPr>
-              <a:t>smartgenerationlab.github.io</a:t>
+              <a:t>051-320-2135</a:t>
             </a:r>
             <a:endParaRPr lang="ko-KR" sz="1300" dirty="0"/>
           </a:p>
@@ -10859,7 +10859,7 @@
                 <a:ea typeface="Pretendard" pitchFamily="34" charset="-122"/>
                 <a:cs typeface="Pretendard" pitchFamily="34" charset="-120"/>
               </a:rPr>
-              <a:t>동서대학교 뉴밀레니엄관 903호</a:t>
+              <a:t>smartgenerationlab.github.io</a:t>
             </a:r>
             <a:endParaRPr lang="ko-KR" sz="1300" dirty="0"/>
           </a:p>

--- a/downloads/sgl-intro.pptx
+++ b/downloads/sgl-intro.pptx
@@ -15948,16 +15948,16 @@
       </p:sp>
       <p:sp>
         <p:nvSpPr>
-          <p:cNvPr id="5" name="Text 4"/>
-          <p:cNvSpPr/>
-          <p:nvPr>
-            <p:ph idx="108" type="body" hasCustomPrompt="1"/>
-          </p:nvPr>
-        </p:nvSpPr>
-        <p:spPr>
-          <a:xfrm>
-            <a:off x="1295400" y="2216150"/>
-            <a:ext cx="4724400" cy="571500"/>
+          <p:cNvPr id="5" name="Text 2"/>
+          <p:cNvSpPr/>
+          <p:nvPr>
+            <p:ph idx="106" type="body" hasCustomPrompt="1"/>
+          </p:nvPr>
+        </p:nvSpPr>
+        <p:spPr>
+          <a:xfrm>
+            <a:off x="762000" y="5784850"/>
+            <a:ext cx="10668000" cy="209550"/>
           </a:xfrm>
           <a:prstGeom prst="rect">
             <a:avLst/>
@@ -15972,6 +15972,48 @@
             <a:pPr algn="l" indent="0" marL="0">
               <a:lnSpc>
                 <a:spcPct val="150000"/>
+              </a:lnSpc>
+              <a:buNone/>
+            </a:pPr>
+            <a:r>
+              <a:rPr lang="ko-KR" altLang="en-US" sz="1100" dirty="0">
+                <a:solidFill>
+                  <a:srgbClr val="6B6B73"/>
+                </a:solidFill>
+                <a:latin typeface="Pretendard" pitchFamily="34" charset="0"/>
+                <a:ea typeface="Pretendard" pitchFamily="34" charset="-122"/>
+                <a:cs typeface="Pretendard" pitchFamily="34" charset="-120"/>
+              </a:rPr>
+              <a:t>leesg@dongseo.ac.kr · smartgenerationlab.github.io</a:t>
+            </a:r>
+            <a:endParaRPr lang="ko-KR" sz="1100" dirty="0"/>
+          </a:p>
+        </p:txBody>
+      </p:sp>
+      <p:sp>
+        <p:nvSpPr>
+          <p:cNvPr id="6" name="Text 4"/>
+          <p:cNvSpPr txBox="1"/>
+          <p:nvPr/>
+        </p:nvSpPr>
+        <p:spPr>
+          <a:xfrm>
+            <a:off x="762000" y="2038350"/>
+            <a:ext cx="5257800" cy="3556000"/>
+          </a:xfrm>
+          <a:prstGeom prst="rect">
+            <a:avLst/>
+          </a:prstGeom>
+          <a:noFill/>
+          <a:ln/>
+        </p:spPr>
+        <p:txBody>
+          <a:bodyPr wrap="square" lIns="0" tIns="0" rIns="0" bIns="0" rtlCol="0" anchor="t"/>
+          <a:lstStyle/>
+          <a:p>
+            <a:pPr indent="0" marL="0">
+              <a:lnSpc>
+                <a:spcPct val="140000"/>
               </a:lnSpc>
               <a:buNone/>
             </a:pPr>
@@ -15986,54 +16028,76 @@
               </a:rPr>
               <a:t>학력</a:t>
             </a:r>
-            <a:pPr algn="l" indent="0" marL="0">
-              <a:lnSpc>
-                <a:spcPct val="150000"/>
-              </a:lnSpc>
-              <a:buNone/>
-            </a:pPr>
-            <a:r>
-              <a:rPr lang="ko-KR" altLang="en-US" sz="1000" dirty="0">
-                <a:solidFill>
-                  <a:srgbClr val="6B6B73"/>
-                </a:solidFill>
-                <a:latin typeface="Pretendard" pitchFamily="34" charset="0"/>
-                <a:ea typeface="Pretendard" pitchFamily="34" charset="-122"/>
-                <a:cs typeface="Pretendard" pitchFamily="34" charset="-120"/>
-              </a:rPr>
-              <a:t> — 부산대 전기전자컴퓨터공학과 공학박사 · 부산대 컴퓨터공학과 공학석사 · 부산대 정보컴퓨터공학부 공학사</a:t>
-            </a:r>
-            <a:endParaRPr lang="ko-KR" sz="1500" dirty="0"/>
-          </a:p>
-        </p:txBody>
-      </p:sp>
-      <p:sp>
-        <p:nvSpPr>
-          <p:cNvPr id="6" name="Text 6"/>
-          <p:cNvSpPr/>
-          <p:nvPr>
-            <p:ph idx="111" type="body" hasCustomPrompt="1"/>
-          </p:nvPr>
-        </p:nvSpPr>
-        <p:spPr>
-          <a:xfrm>
-            <a:off x="1295400" y="2857500"/>
-            <a:ext cx="4724400" cy="571500"/>
-          </a:xfrm>
-          <a:prstGeom prst="rect">
-            <a:avLst/>
-          </a:prstGeom>
-          <a:noFill/>
-          <a:ln/>
-        </p:spPr>
-        <p:txBody>
-          <a:bodyPr wrap="square" lIns="0" tIns="0" rIns="0" bIns="0" rtlCol="0" anchor="t"/>
-          <a:lstStyle/>
-          <a:p>
-            <a:pPr algn="l" indent="0" marL="0">
-              <a:lnSpc>
-                <a:spcPct val="150000"/>
-              </a:lnSpc>
+            <a:endParaRPr lang="ko-KR" sz="1200" dirty="0"/>
+          </a:p>
+          <a:p>
+            <a:pPr indent="0" marL="0">
+              <a:lnSpc>
+                <a:spcPct val="140000"/>
+              </a:lnSpc>
+              <a:buNone/>
+            </a:pPr>
+            <a:r>
+              <a:rPr lang="ko-KR" altLang="en-US" sz="1100" dirty="0">
+                <a:solidFill>
+                  <a:srgbClr val="2E2E33"/>
+                </a:solidFill>
+                <a:latin typeface="Pretendard" pitchFamily="34" charset="0"/>
+                <a:ea typeface="Pretendard" pitchFamily="34" charset="-122"/>
+                <a:cs typeface="Pretendard" pitchFamily="34" charset="-120"/>
+              </a:rPr>
+              <a:t>부산대 전기전자컴퓨터공학과 공학박사</a:t>
+            </a:r>
+            <a:endParaRPr lang="ko-KR" sz="1200" dirty="0"/>
+          </a:p>
+          <a:p>
+            <a:pPr indent="0" marL="0">
+              <a:lnSpc>
+                <a:spcPct val="140000"/>
+              </a:lnSpc>
+              <a:buNone/>
+            </a:pPr>
+            <a:r>
+              <a:rPr lang="ko-KR" altLang="en-US" sz="1100" dirty="0">
+                <a:solidFill>
+                  <a:srgbClr val="2E2E33"/>
+                </a:solidFill>
+                <a:latin typeface="Pretendard" pitchFamily="34" charset="0"/>
+                <a:ea typeface="Pretendard" pitchFamily="34" charset="-122"/>
+                <a:cs typeface="Pretendard" pitchFamily="34" charset="-120"/>
+              </a:rPr>
+              <a:t>부산대 컴퓨터공학과 공학석사</a:t>
+            </a:r>
+            <a:endParaRPr lang="ko-KR" sz="1200" dirty="0"/>
+          </a:p>
+          <a:p>
+            <a:pPr indent="0" marL="0">
+              <a:lnSpc>
+                <a:spcPct val="140000"/>
+              </a:lnSpc>
+              <a:buNone/>
+            </a:pPr>
+            <a:r>
+              <a:rPr lang="ko-KR" altLang="en-US" sz="1100" dirty="0">
+                <a:solidFill>
+                  <a:srgbClr val="2E2E33"/>
+                </a:solidFill>
+                <a:latin typeface="Pretendard" pitchFamily="34" charset="0"/>
+                <a:ea typeface="Pretendard" pitchFamily="34" charset="-122"/>
+                <a:cs typeface="Pretendard" pitchFamily="34" charset="-120"/>
+              </a:rPr>
+              <a:t>부산대 정보컴퓨터공학부 공학사</a:t>
+            </a:r>
+            <a:endParaRPr lang="ko-KR" sz="1200" dirty="0"/>
+          </a:p>
+          <a:p>
+            <a:pPr indent="0" marL="0">
+              <a:lnSpc>
+                <a:spcPct val="140000"/>
+              </a:lnSpc>
+              <a:spcBef>
+                <a:spcPts val="1800"/>
+              </a:spcBef>
               <a:buNone/>
             </a:pPr>
             <a:r>
@@ -16047,54 +16111,76 @@
               </a:rPr>
               <a:t>경력</a:t>
             </a:r>
-            <a:pPr algn="l" indent="0" marL="0">
-              <a:lnSpc>
-                <a:spcPct val="150000"/>
-              </a:lnSpc>
-              <a:buNone/>
-            </a:pPr>
-            <a:r>
-              <a:rPr lang="ko-KR" altLang="en-US" sz="1000" dirty="0">
-                <a:solidFill>
-                  <a:srgbClr val="6B6B73"/>
-                </a:solidFill>
-                <a:latin typeface="Pretendard" pitchFamily="34" charset="0"/>
-                <a:ea typeface="Pretendard" pitchFamily="34" charset="-122"/>
-                <a:cs typeface="Pretendard" pitchFamily="34" charset="-120"/>
-              </a:rPr>
-              <a:t> — (현) 동서대학교 소프트웨어학과 부교수 · (전) 동국대학교 WE-UP 사업단 연구초빙교수 · (전) 부산대 BK21+ 사업단 연수연구원</a:t>
-            </a:r>
-            <a:endParaRPr lang="ko-KR" sz="1500" dirty="0"/>
-          </a:p>
-        </p:txBody>
-      </p:sp>
-      <p:sp>
-        <p:nvSpPr>
-          <p:cNvPr id="7" name="Text 8"/>
-          <p:cNvSpPr/>
-          <p:nvPr>
-            <p:ph idx="114" type="body" hasCustomPrompt="1"/>
-          </p:nvPr>
-        </p:nvSpPr>
-        <p:spPr>
-          <a:xfrm>
-            <a:off x="1295400" y="3498850"/>
-            <a:ext cx="4724400" cy="571500"/>
-          </a:xfrm>
-          <a:prstGeom prst="rect">
-            <a:avLst/>
-          </a:prstGeom>
-          <a:noFill/>
-          <a:ln/>
-        </p:spPr>
-        <p:txBody>
-          <a:bodyPr wrap="square" lIns="0" tIns="0" rIns="0" bIns="0" rtlCol="0" anchor="t"/>
-          <a:lstStyle/>
-          <a:p>
-            <a:pPr algn="l" indent="0" marL="0">
-              <a:lnSpc>
-                <a:spcPct val="150000"/>
-              </a:lnSpc>
+            <a:endParaRPr lang="ko-KR" sz="1200" dirty="0"/>
+          </a:p>
+          <a:p>
+            <a:pPr indent="0" marL="0">
+              <a:lnSpc>
+                <a:spcPct val="140000"/>
+              </a:lnSpc>
+              <a:buNone/>
+            </a:pPr>
+            <a:r>
+              <a:rPr lang="ko-KR" altLang="en-US" sz="1100" dirty="0">
+                <a:solidFill>
+                  <a:srgbClr val="2E2E33"/>
+                </a:solidFill>
+                <a:latin typeface="Pretendard" pitchFamily="34" charset="0"/>
+                <a:ea typeface="Pretendard" pitchFamily="34" charset="-122"/>
+                <a:cs typeface="Pretendard" pitchFamily="34" charset="-120"/>
+              </a:rPr>
+              <a:t>(현) 동서대학교 소프트웨어학과 부교수</a:t>
+            </a:r>
+            <a:endParaRPr lang="ko-KR" sz="1200" dirty="0"/>
+          </a:p>
+          <a:p>
+            <a:pPr indent="0" marL="0">
+              <a:lnSpc>
+                <a:spcPct val="140000"/>
+              </a:lnSpc>
+              <a:buNone/>
+            </a:pPr>
+            <a:r>
+              <a:rPr lang="ko-KR" altLang="en-US" sz="1100" dirty="0">
+                <a:solidFill>
+                  <a:srgbClr val="2E2E33"/>
+                </a:solidFill>
+                <a:latin typeface="Pretendard" pitchFamily="34" charset="0"/>
+                <a:ea typeface="Pretendard" pitchFamily="34" charset="-122"/>
+                <a:cs typeface="Pretendard" pitchFamily="34" charset="-120"/>
+              </a:rPr>
+              <a:t>(전) 동국대학교 WE-UP 사업단 연구초빙교수</a:t>
+            </a:r>
+            <a:endParaRPr lang="ko-KR" sz="1200" dirty="0"/>
+          </a:p>
+          <a:p>
+            <a:pPr indent="0" marL="0">
+              <a:lnSpc>
+                <a:spcPct val="140000"/>
+              </a:lnSpc>
+              <a:buNone/>
+            </a:pPr>
+            <a:r>
+              <a:rPr lang="ko-KR" altLang="en-US" sz="1100" dirty="0">
+                <a:solidFill>
+                  <a:srgbClr val="2E2E33"/>
+                </a:solidFill>
+                <a:latin typeface="Pretendard" pitchFamily="34" charset="0"/>
+                <a:ea typeface="Pretendard" pitchFamily="34" charset="-122"/>
+                <a:cs typeface="Pretendard" pitchFamily="34" charset="-120"/>
+              </a:rPr>
+              <a:t>(전) 부산대 BK21+ 사업단 연수연구원</a:t>
+            </a:r>
+            <a:endParaRPr lang="ko-KR" sz="1200" dirty="0"/>
+          </a:p>
+          <a:p>
+            <a:pPr indent="0" marL="0">
+              <a:lnSpc>
+                <a:spcPct val="140000"/>
+              </a:lnSpc>
+              <a:spcBef>
+                <a:spcPts val="1800"/>
+              </a:spcBef>
               <a:buNone/>
             </a:pPr>
             <a:r>
@@ -16108,30 +16194,33 @@
               </a:rPr>
               <a:t>관심</a:t>
             </a:r>
-            <a:pPr algn="l" indent="0" marL="0">
-              <a:lnSpc>
-                <a:spcPct val="150000"/>
-              </a:lnSpc>
-              <a:buNone/>
-            </a:pPr>
-            <a:r>
-              <a:rPr lang="ko-KR" altLang="en-US" sz="1000" dirty="0">
-                <a:solidFill>
-                  <a:srgbClr val="6B6B73"/>
-                </a:solidFill>
-                <a:latin typeface="Pretendard" pitchFamily="34" charset="0"/>
-                <a:ea typeface="Pretendard" pitchFamily="34" charset="-122"/>
-                <a:cs typeface="Pretendard" pitchFamily="34" charset="-120"/>
-              </a:rPr>
-              <a:t> — 관심 분야는 딥러닝, 기계학습, 신경망, 컴퓨터 비전, 이미지 처리.</a:t>
-            </a:r>
-            <a:endParaRPr lang="ko-KR" sz="1500" dirty="0"/>
+            <a:endParaRPr lang="ko-KR" sz="1200" dirty="0"/>
+          </a:p>
+          <a:p>
+            <a:pPr indent="0" marL="0">
+              <a:lnSpc>
+                <a:spcPct val="140000"/>
+              </a:lnSpc>
+              <a:buNone/>
+            </a:pPr>
+            <a:r>
+              <a:rPr lang="ko-KR" altLang="en-US" sz="1100" dirty="0">
+                <a:solidFill>
+                  <a:srgbClr val="2E2E33"/>
+                </a:solidFill>
+                <a:latin typeface="Pretendard" pitchFamily="34" charset="0"/>
+                <a:ea typeface="Pretendard" pitchFamily="34" charset="-122"/>
+                <a:cs typeface="Pretendard" pitchFamily="34" charset="-120"/>
+              </a:rPr>
+              <a:t>관심 분야는 딥러닝, 기계학습, 신경망, 컴퓨터 비전, 이미지 처리.</a:t>
+            </a:r>
+            <a:endParaRPr lang="ko-KR" sz="1200" dirty="0"/>
           </a:p>
         </p:txBody>
       </p:sp>
       <p:pic>
         <p:nvPicPr>
-          <p:cNvPr id="8" name="Image 0" descr="/home/runner/work/sglab-brand/sglab-brand/web/images/lee-sang-geol.jpg">    </p:cNvPr>
+          <p:cNvPr id="7" name="Image 0" descr="/home/runner/work/sglab-brand/sglab-brand/web/images/lee-sang-geol.jpg">    </p:cNvPr>
           <p:cNvPicPr>
             <a:picLocks noChangeAspect="1"/>
           </p:cNvPicPr>
@@ -16145,44 +16234,14 @@
         </p:blipFill>
         <p:spPr>
           <a:xfrm>
-            <a:off x="7800975" y="2038350"/>
-            <a:ext cx="2000250" cy="2667000"/>
+            <a:off x="7562850" y="2038350"/>
+            <a:ext cx="2476500" cy="3302000"/>
           </a:xfrm>
           <a:prstGeom prst="rect">
             <a:avLst/>
           </a:prstGeom>
         </p:spPr>
       </p:pic>
-      <p:sp>
-        <p:nvSpPr>
-          <p:cNvPr id="9" name="Text 11"/>
-          <p:cNvSpPr/>
-          <p:nvPr>
-            <p:ph idx="118" hasCustomPrompt="1"/>
-          </p:nvPr>
-        </p:nvSpPr>
-        <p:spPr>
-          <a:xfrm>
-            <a:off x="6172200" y="2038350"/>
-            <a:ext cx="5257800" cy="2667000"/>
-          </a:xfrm>
-          <a:prstGeom prst="rect">
-            <a:avLst/>
-          </a:prstGeom>
-          <a:noFill/>
-          <a:ln/>
-        </p:spPr>
-        <p:txBody>
-          <a:bodyPr wrap="square" rtlCol="0"/>
-          <a:lstStyle/>
-          <a:p>
-            <a:pPr indent="0" marL="0">
-              <a:buNone/>
-            </a:pPr>
-            <a:endParaRPr lang="en-US" dirty="0"/>
-          </a:p>
-        </p:txBody>
-      </p:sp>
       <p:sp>
         <p:nvSpPr>
           <p:cNvPr id="25" name="Slide Number Placeholder 0"/>

--- a/downloads/sgl-intro.pptx
+++ b/downloads/sgl-intro.pptx
@@ -15940,7 +15940,7 @@
                 <a:ea typeface="Pretendard" pitchFamily="34" charset="-122"/>
                 <a:cs typeface="Pretendard" pitchFamily="34" charset="-120"/>
               </a:rPr>
-              <a:t>Sang-Geol Lee, Ph.D. · 지도교수</a:t>
+              <a:t> </a:t>
             </a:r>
             <a:endParaRPr lang="ko-KR" sz="1300" dirty="0"/>
           </a:p>
@@ -16015,6 +16015,32 @@
               <a:lnSpc>
                 <a:spcPct val="140000"/>
               </a:lnSpc>
+              <a:spcAft>
+                <a:spcPts val="1000"/>
+              </a:spcAft>
+              <a:buNone/>
+            </a:pPr>
+            <a:r>
+              <a:rPr lang="ko-KR" altLang="en-US" sz="1100" dirty="0">
+                <a:solidFill>
+                  <a:srgbClr val="6B6B73"/>
+                </a:solidFill>
+                <a:latin typeface="Pretendard" pitchFamily="34" charset="0"/>
+                <a:ea typeface="Pretendard" pitchFamily="34" charset="-122"/>
+                <a:cs typeface="Pretendard" pitchFamily="34" charset="-120"/>
+              </a:rPr>
+              <a:t>Sang-Geol Lee, Ph.D. · 지도교수 · Principal Investigator</a:t>
+            </a:r>
+            <a:endParaRPr lang="ko-KR" sz="1100" dirty="0"/>
+          </a:p>
+          <a:p>
+            <a:pPr indent="0" marL="0">
+              <a:lnSpc>
+                <a:spcPct val="140000"/>
+              </a:lnSpc>
+              <a:spcBef>
+                <a:spcPts val="1800"/>
+              </a:spcBef>
               <a:buNone/>
             </a:pPr>
             <a:r>
@@ -16028,7 +16054,7 @@
               </a:rPr>
               <a:t>학력</a:t>
             </a:r>
-            <a:endParaRPr lang="ko-KR" sz="1200" dirty="0"/>
+            <a:endParaRPr lang="ko-KR" sz="1100" dirty="0"/>
           </a:p>
           <a:p>
             <a:pPr indent="0" marL="0">
@@ -16048,7 +16074,7 @@
               </a:rPr>
               <a:t>부산대 전기전자컴퓨터공학과 공학박사</a:t>
             </a:r>
-            <a:endParaRPr lang="ko-KR" sz="1200" dirty="0"/>
+            <a:endParaRPr lang="ko-KR" sz="1100" dirty="0"/>
           </a:p>
           <a:p>
             <a:pPr indent="0" marL="0">
@@ -16068,7 +16094,7 @@
               </a:rPr>
               <a:t>부산대 컴퓨터공학과 공학석사</a:t>
             </a:r>
-            <a:endParaRPr lang="ko-KR" sz="1200" dirty="0"/>
+            <a:endParaRPr lang="ko-KR" sz="1100" dirty="0"/>
           </a:p>
           <a:p>
             <a:pPr indent="0" marL="0">
@@ -16088,7 +16114,7 @@
               </a:rPr>
               <a:t>부산대 정보컴퓨터공학부 공학사</a:t>
             </a:r>
-            <a:endParaRPr lang="ko-KR" sz="1200" dirty="0"/>
+            <a:endParaRPr lang="ko-KR" sz="1100" dirty="0"/>
           </a:p>
           <a:p>
             <a:pPr indent="0" marL="0">
@@ -16111,7 +16137,7 @@
               </a:rPr>
               <a:t>경력</a:t>
             </a:r>
-            <a:endParaRPr lang="ko-KR" sz="1200" dirty="0"/>
+            <a:endParaRPr lang="ko-KR" sz="1100" dirty="0"/>
           </a:p>
           <a:p>
             <a:pPr indent="0" marL="0">
@@ -16131,7 +16157,7 @@
               </a:rPr>
               <a:t>(현) 동서대학교 소프트웨어학과 부교수</a:t>
             </a:r>
-            <a:endParaRPr lang="ko-KR" sz="1200" dirty="0"/>
+            <a:endParaRPr lang="ko-KR" sz="1100" dirty="0"/>
           </a:p>
           <a:p>
             <a:pPr indent="0" marL="0">
@@ -16151,7 +16177,7 @@
               </a:rPr>
               <a:t>(전) 동국대학교 WE-UP 사업단 연구초빙교수</a:t>
             </a:r>
-            <a:endParaRPr lang="ko-KR" sz="1200" dirty="0"/>
+            <a:endParaRPr lang="ko-KR" sz="1100" dirty="0"/>
           </a:p>
           <a:p>
             <a:pPr indent="0" marL="0">
@@ -16171,7 +16197,7 @@
               </a:rPr>
               <a:t>(전) 부산대 BK21+ 사업단 연수연구원</a:t>
             </a:r>
-            <a:endParaRPr lang="ko-KR" sz="1200" dirty="0"/>
+            <a:endParaRPr lang="ko-KR" sz="1100" dirty="0"/>
           </a:p>
           <a:p>
             <a:pPr indent="0" marL="0">
@@ -16194,7 +16220,7 @@
               </a:rPr>
               <a:t>관심</a:t>
             </a:r>
-            <a:endParaRPr lang="ko-KR" sz="1200" dirty="0"/>
+            <a:endParaRPr lang="ko-KR" sz="1100" dirty="0"/>
           </a:p>
           <a:p>
             <a:pPr indent="0" marL="0">
@@ -16214,7 +16240,7 @@
               </a:rPr>
               <a:t>관심 분야는 딥러닝, 기계학습, 신경망, 컴퓨터 비전, 이미지 처리.</a:t>
             </a:r>
-            <a:endParaRPr lang="ko-KR" sz="1200" dirty="0"/>
+            <a:endParaRPr lang="ko-KR" sz="1100" dirty="0"/>
           </a:p>
         </p:txBody>
       </p:sp>

--- a/downloads/sgl-intro.pptx
+++ b/downloads/sgl-intro.pptx
@@ -12860,7 +12860,7 @@
                 <a:ea typeface="Pretendard" pitchFamily="34" charset="-122"/>
                 <a:cs typeface="Pretendard" pitchFamily="34" charset="-120"/>
               </a:rPr>
-              <a:t>연구 결과 9건은 논문 목록 참조 · https://smartgenerationlab.github.io/projects.html</a:t>
+              <a:t>연구 결과 9건은 논문 목록 참조 · smartgenerationlab.github.io/projects.html</a:t>
             </a:r>
             <a:endParaRPr lang="ko-KR" sz="1100" dirty="0"/>
           </a:p>
@@ -15724,7 +15724,7 @@
                 <a:ea typeface="Pretendard" pitchFamily="34" charset="-122"/>
                 <a:cs typeface="Pretendard" pitchFamily="34" charset="-120"/>
               </a:rPr>
-              <a:t>https://smartgenerationlab.github.io/activities.html</a:t>
+              <a:t>smartgenerationlab.github.io/activities.html</a:t>
             </a:r>
             <a:endParaRPr lang="ko-KR" sz="1200" dirty="0"/>
           </a:p>
